--- a/examples/pm6_stylebase/different_style_sample.pptx
+++ b/examples/pm6_stylebase/different_style_sample.pptx
@@ -648,49 +648,31 @@
           <a:p/>
           <a:p>
             <a:r>
-              <a:t>```{=latex}</a:t>
-            </a:r>
-          </a:p>
-          <a:p>
-            <a:r>
-              <a:t>\par\vspace{1\baselineskip}</a:t>
-            </a:r>
-          </a:p>
-          <a:p>
-            <a:r>
-              <a:t>\begin{center}</a:t>
-            </a:r>
-          </a:p>
-          <a:p>
-            <a:r>
-              <a:t>```</a:t>
+              <a:t>{{vspace:1}}</a:t>
             </a:r>
           </a:p>
           <a:p/>
           <a:p>
             <a:r>
+              <a:t>::: {.center}</a:t>
+            </a:r>
+          </a:p>
+          <a:p/>
+          <a:p>
+            <a:r>
               <a:t>![](figures/&lt;__BASEFILENAME__&gt;_slide&lt;__SLIDENUM__&gt;_fig.png){ width=95% }</a:t>
             </a:r>
           </a:p>
           <a:p/>
           <a:p>
             <a:r>
-              <a:t>```{=latex}</a:t>
-            </a:r>
-          </a:p>
-          <a:p>
-            <a:r>
-              <a:t>\end{center}</a:t>
-            </a:r>
-          </a:p>
-          <a:p>
-            <a:r>
-              <a:t>\par\vspace{1\baselineskip}</a:t>
-            </a:r>
-          </a:p>
-          <a:p>
-            <a:r>
-              <a:t>```</a:t>
+              <a:t>:::</a:t>
+            </a:r>
+          </a:p>
+          <a:p/>
+          <a:p>
+            <a:r>
+              <a:t>{{vspace:1}}</a:t>
             </a:r>
           </a:p>
         </p:txBody>
